--- a/PPT FLIPKART SALES ANALYSIS - 7-3-26.pptx
+++ b/PPT FLIPKART SALES ANALYSIS - 7-3-26.pptx
@@ -180,7 +180,7 @@
           <a:noFill/>
           <a:extLst>
             <a:ext uri="{909E8E84-426E-40dd-AFC4-6F175D3DCCD1}">
-              <a14:hiddenFill xmlns:a14="http://schemas.microsoft.com/office/drawing/2010/main" xmlns="">
+              <a14:hiddenFill xmlns="" xmlns:a14="http://schemas.microsoft.com/office/drawing/2010/main">
                 <a:solidFill>
                   <a:srgbClr val="FFFFFF"/>
                 </a:solidFill>
@@ -240,7 +240,7 @@
             </a:ln>
             <a:extLst>
               <a:ext uri="{91240B29-F687-4f45-9708-019B960494DF}">
-                <a14:hiddenLine xmlns:a14="http://schemas.microsoft.com/office/drawing/2010/main" xmlns="" w="9525">
+                <a14:hiddenLine xmlns="" xmlns:a14="http://schemas.microsoft.com/office/drawing/2010/main" w="9525">
                   <a:solidFill>
                     <a:srgbClr val="000000"/>
                   </a:solidFill>
@@ -330,7 +330,7 @@
             </a:ln>
             <a:extLst>
               <a:ext uri="{91240B29-F687-4f45-9708-019B960494DF}">
-                <a14:hiddenLine xmlns:a14="http://schemas.microsoft.com/office/drawing/2010/main" xmlns="" w="9525">
+                <a14:hiddenLine xmlns="" xmlns:a14="http://schemas.microsoft.com/office/drawing/2010/main" w="9525">
                   <a:solidFill>
                     <a:srgbClr val="000000"/>
                   </a:solidFill>
@@ -420,7 +420,7 @@
             </a:ln>
             <a:extLst>
               <a:ext uri="{91240B29-F687-4f45-9708-019B960494DF}">
-                <a14:hiddenLine xmlns:a14="http://schemas.microsoft.com/office/drawing/2010/main" xmlns="" w="9525">
+                <a14:hiddenLine xmlns="" xmlns:a14="http://schemas.microsoft.com/office/drawing/2010/main" w="9525">
                   <a:solidFill>
                     <a:srgbClr val="000000"/>
                   </a:solidFill>
@@ -454,7 +454,7 @@
             </a:ln>
             <a:extLst>
               <a:ext uri="{91240B29-F687-4f45-9708-019B960494DF}">
-                <a14:hiddenLine xmlns:a14="http://schemas.microsoft.com/office/drawing/2010/main" xmlns="" w="9525">
+                <a14:hiddenLine xmlns="" xmlns:a14="http://schemas.microsoft.com/office/drawing/2010/main" w="9525">
                   <a:solidFill>
                     <a:srgbClr val="000000"/>
                   </a:solidFill>
@@ -544,7 +544,7 @@
             </a:ln>
             <a:extLst>
               <a:ext uri="{91240B29-F687-4f45-9708-019B960494DF}">
-                <a14:hiddenLine xmlns:a14="http://schemas.microsoft.com/office/drawing/2010/main" xmlns="" w="9525">
+                <a14:hiddenLine xmlns="" xmlns:a14="http://schemas.microsoft.com/office/drawing/2010/main" w="9525">
                   <a:solidFill>
                     <a:srgbClr val="000000"/>
                   </a:solidFill>
@@ -606,7 +606,7 @@
             </a:ln>
             <a:extLst>
               <a:ext uri="{91240B29-F687-4f45-9708-019B960494DF}">
-                <a14:hiddenLine xmlns:a14="http://schemas.microsoft.com/office/drawing/2010/main" xmlns="" w="9525">
+                <a14:hiddenLine xmlns="" xmlns:a14="http://schemas.microsoft.com/office/drawing/2010/main" w="9525">
                   <a:solidFill>
                     <a:srgbClr val="000000"/>
                   </a:solidFill>
@@ -668,7 +668,7 @@
             </a:ln>
             <a:extLst>
               <a:ext uri="{91240B29-F687-4f45-9708-019B960494DF}">
-                <a14:hiddenLine xmlns:a14="http://schemas.microsoft.com/office/drawing/2010/main" xmlns="" w="9525">
+                <a14:hiddenLine xmlns="" xmlns:a14="http://schemas.microsoft.com/office/drawing/2010/main" w="9525">
                   <a:solidFill>
                     <a:srgbClr val="000000"/>
                   </a:solidFill>
@@ -758,7 +758,7 @@
             </a:ln>
             <a:extLst>
               <a:ext uri="{91240B29-F687-4f45-9708-019B960494DF}">
-                <a14:hiddenLine xmlns:a14="http://schemas.microsoft.com/office/drawing/2010/main" xmlns="" w="9525">
+                <a14:hiddenLine xmlns="" xmlns:a14="http://schemas.microsoft.com/office/drawing/2010/main" w="9525">
                   <a:solidFill>
                     <a:srgbClr val="000000"/>
                   </a:solidFill>
@@ -820,7 +820,7 @@
             </a:ln>
             <a:extLst>
               <a:ext uri="{91240B29-F687-4f45-9708-019B960494DF}">
-                <a14:hiddenLine xmlns:a14="http://schemas.microsoft.com/office/drawing/2010/main" xmlns="" w="9525">
+                <a14:hiddenLine xmlns="" xmlns:a14="http://schemas.microsoft.com/office/drawing/2010/main" w="9525">
                   <a:solidFill>
                     <a:srgbClr val="000000"/>
                   </a:solidFill>
@@ -882,7 +882,7 @@
             </a:ln>
             <a:extLst>
               <a:ext uri="{91240B29-F687-4f45-9708-019B960494DF}">
-                <a14:hiddenLine xmlns:a14="http://schemas.microsoft.com/office/drawing/2010/main" xmlns="" w="9525">
+                <a14:hiddenLine xmlns="" xmlns:a14="http://schemas.microsoft.com/office/drawing/2010/main" w="9525">
                   <a:solidFill>
                     <a:srgbClr val="000000"/>
                   </a:solidFill>
@@ -972,7 +972,7 @@
             </a:ln>
             <a:extLst>
               <a:ext uri="{91240B29-F687-4f45-9708-019B960494DF}">
-                <a14:hiddenLine xmlns:a14="http://schemas.microsoft.com/office/drawing/2010/main" xmlns="" w="9525">
+                <a14:hiddenLine xmlns="" xmlns:a14="http://schemas.microsoft.com/office/drawing/2010/main" w="9525">
                   <a:solidFill>
                     <a:srgbClr val="000000"/>
                   </a:solidFill>
@@ -1062,7 +1062,7 @@
             </a:ln>
             <a:extLst>
               <a:ext uri="{91240B29-F687-4f45-9708-019B960494DF}">
-                <a14:hiddenLine xmlns:a14="http://schemas.microsoft.com/office/drawing/2010/main" xmlns="" w="9525">
+                <a14:hiddenLine xmlns="" xmlns:a14="http://schemas.microsoft.com/office/drawing/2010/main" w="9525">
                   <a:solidFill>
                     <a:srgbClr val="000000"/>
                   </a:solidFill>
@@ -1124,7 +1124,7 @@
             </a:ln>
             <a:extLst>
               <a:ext uri="{91240B29-F687-4f45-9708-019B960494DF}">
-                <a14:hiddenLine xmlns:a14="http://schemas.microsoft.com/office/drawing/2010/main" xmlns="" w="9525">
+                <a14:hiddenLine xmlns="" xmlns:a14="http://schemas.microsoft.com/office/drawing/2010/main" w="9525">
                   <a:solidFill>
                     <a:srgbClr val="000000"/>
                   </a:solidFill>
@@ -1234,7 +1234,7 @@
             </a:ln>
             <a:extLst>
               <a:ext uri="{91240B29-F687-4f45-9708-019B960494DF}">
-                <a14:hiddenLine xmlns:a14="http://schemas.microsoft.com/office/drawing/2010/main" xmlns="" w="9525">
+                <a14:hiddenLine xmlns="" xmlns:a14="http://schemas.microsoft.com/office/drawing/2010/main" w="9525">
                   <a:solidFill>
                     <a:srgbClr val="000000"/>
                   </a:solidFill>
@@ -1296,7 +1296,7 @@
             </a:ln>
             <a:extLst>
               <a:ext uri="{91240B29-F687-4f45-9708-019B960494DF}">
-                <a14:hiddenLine xmlns:a14="http://schemas.microsoft.com/office/drawing/2010/main" xmlns="" w="9525">
+                <a14:hiddenLine xmlns="" xmlns:a14="http://schemas.microsoft.com/office/drawing/2010/main" w="9525">
                   <a:solidFill>
                     <a:srgbClr val="000000"/>
                   </a:solidFill>
@@ -1386,7 +1386,7 @@
             </a:ln>
             <a:extLst>
               <a:ext uri="{91240B29-F687-4f45-9708-019B960494DF}">
-                <a14:hiddenLine xmlns:a14="http://schemas.microsoft.com/office/drawing/2010/main" xmlns="" w="9525">
+                <a14:hiddenLine xmlns="" xmlns:a14="http://schemas.microsoft.com/office/drawing/2010/main" w="9525">
                   <a:solidFill>
                     <a:srgbClr val="000000"/>
                   </a:solidFill>
@@ -1476,7 +1476,7 @@
             </a:ln>
             <a:extLst>
               <a:ext uri="{91240B29-F687-4f45-9708-019B960494DF}">
-                <a14:hiddenLine xmlns:a14="http://schemas.microsoft.com/office/drawing/2010/main" xmlns="" w="9525">
+                <a14:hiddenLine xmlns="" xmlns:a14="http://schemas.microsoft.com/office/drawing/2010/main" w="9525">
                   <a:solidFill>
                     <a:srgbClr val="000000"/>
                   </a:solidFill>
@@ -1538,7 +1538,7 @@
             </a:ln>
             <a:extLst>
               <a:ext uri="{91240B29-F687-4f45-9708-019B960494DF}">
-                <a14:hiddenLine xmlns:a14="http://schemas.microsoft.com/office/drawing/2010/main" xmlns="" w="9525">
+                <a14:hiddenLine xmlns="" xmlns:a14="http://schemas.microsoft.com/office/drawing/2010/main" w="9525">
                   <a:solidFill>
                     <a:srgbClr val="000000"/>
                   </a:solidFill>
@@ -1628,7 +1628,7 @@
             </a:ln>
             <a:extLst>
               <a:ext uri="{91240B29-F687-4f45-9708-019B960494DF}">
-                <a14:hiddenLine xmlns:a14="http://schemas.microsoft.com/office/drawing/2010/main" xmlns="" w="9525">
+                <a14:hiddenLine xmlns="" xmlns:a14="http://schemas.microsoft.com/office/drawing/2010/main" w="9525">
                   <a:solidFill>
                     <a:srgbClr val="000000"/>
                   </a:solidFill>
@@ -1718,7 +1718,7 @@
             </a:ln>
             <a:extLst>
               <a:ext uri="{91240B29-F687-4f45-9708-019B960494DF}">
-                <a14:hiddenLine xmlns:a14="http://schemas.microsoft.com/office/drawing/2010/main" xmlns="" w="9525">
+                <a14:hiddenLine xmlns="" xmlns:a14="http://schemas.microsoft.com/office/drawing/2010/main" w="9525">
                   <a:solidFill>
                     <a:srgbClr val="000000"/>
                   </a:solidFill>
@@ -1774,7 +1774,7 @@
             </a:ln>
             <a:extLst>
               <a:ext uri="{91240B29-F687-4f45-9708-019B960494DF}">
-                <a14:hiddenLine xmlns:a14="http://schemas.microsoft.com/office/drawing/2010/main" xmlns="" w="9525">
+                <a14:hiddenLine xmlns="" xmlns:a14="http://schemas.microsoft.com/office/drawing/2010/main" w="9525">
                   <a:solidFill>
                     <a:srgbClr val="000000"/>
                   </a:solidFill>
@@ -1864,7 +1864,7 @@
             </a:ln>
             <a:extLst>
               <a:ext uri="{91240B29-F687-4f45-9708-019B960494DF}">
-                <a14:hiddenLine xmlns:a14="http://schemas.microsoft.com/office/drawing/2010/main" xmlns="" w="9525">
+                <a14:hiddenLine xmlns="" xmlns:a14="http://schemas.microsoft.com/office/drawing/2010/main" w="9525">
                   <a:solidFill>
                     <a:srgbClr val="000000"/>
                   </a:solidFill>
@@ -1920,7 +1920,7 @@
             </a:ln>
             <a:extLst>
               <a:ext uri="{91240B29-F687-4f45-9708-019B960494DF}">
-                <a14:hiddenLine xmlns:a14="http://schemas.microsoft.com/office/drawing/2010/main" xmlns="" w="9525">
+                <a14:hiddenLine xmlns="" xmlns:a14="http://schemas.microsoft.com/office/drawing/2010/main" w="9525">
                   <a:solidFill>
                     <a:srgbClr val="000000"/>
                   </a:solidFill>
@@ -2010,7 +2010,7 @@
             </a:ln>
             <a:extLst>
               <a:ext uri="{91240B29-F687-4f45-9708-019B960494DF}">
-                <a14:hiddenLine xmlns:a14="http://schemas.microsoft.com/office/drawing/2010/main" xmlns="" w="9525">
+                <a14:hiddenLine xmlns="" xmlns:a14="http://schemas.microsoft.com/office/drawing/2010/main" w="9525">
                   <a:solidFill>
                     <a:srgbClr val="000000"/>
                   </a:solidFill>
@@ -2078,7 +2078,7 @@
             </a:ln>
             <a:extLst>
               <a:ext uri="{91240B29-F687-4f45-9708-019B960494DF}">
-                <a14:hiddenLine xmlns:a14="http://schemas.microsoft.com/office/drawing/2010/main" xmlns="" w="9525">
+                <a14:hiddenLine xmlns="" xmlns:a14="http://schemas.microsoft.com/office/drawing/2010/main" w="9525">
                   <a:solidFill>
                     <a:srgbClr val="000000"/>
                   </a:solidFill>
@@ -2168,7 +2168,7 @@
             </a:ln>
             <a:extLst>
               <a:ext uri="{91240B29-F687-4f45-9708-019B960494DF}">
-                <a14:hiddenLine xmlns:a14="http://schemas.microsoft.com/office/drawing/2010/main" xmlns="" w="9525">
+                <a14:hiddenLine xmlns="" xmlns:a14="http://schemas.microsoft.com/office/drawing/2010/main" w="9525">
                   <a:solidFill>
                     <a:srgbClr val="000000"/>
                   </a:solidFill>
@@ -2236,7 +2236,7 @@
             </a:ln>
             <a:extLst>
               <a:ext uri="{91240B29-F687-4f45-9708-019B960494DF}">
-                <a14:hiddenLine xmlns:a14="http://schemas.microsoft.com/office/drawing/2010/main" xmlns="" w="9525">
+                <a14:hiddenLine xmlns="" xmlns:a14="http://schemas.microsoft.com/office/drawing/2010/main" w="9525">
                   <a:solidFill>
                     <a:srgbClr val="000000"/>
                   </a:solidFill>
@@ -2326,7 +2326,7 @@
             </a:ln>
             <a:extLst>
               <a:ext uri="{91240B29-F687-4f45-9708-019B960494DF}">
-                <a14:hiddenLine xmlns:a14="http://schemas.microsoft.com/office/drawing/2010/main" xmlns="" w="9525">
+                <a14:hiddenLine xmlns="" xmlns:a14="http://schemas.microsoft.com/office/drawing/2010/main" w="9525">
                   <a:solidFill>
                     <a:srgbClr val="000000"/>
                   </a:solidFill>
@@ -2360,7 +2360,7 @@
             </a:ln>
             <a:extLst>
               <a:ext uri="{91240B29-F687-4f45-9708-019B960494DF}">
-                <a14:hiddenLine xmlns:a14="http://schemas.microsoft.com/office/drawing/2010/main" xmlns="" w="9525">
+                <a14:hiddenLine xmlns="" xmlns:a14="http://schemas.microsoft.com/office/drawing/2010/main" w="9525">
                   <a:solidFill>
                     <a:srgbClr val="000000"/>
                   </a:solidFill>
@@ -2450,7 +2450,7 @@
             </a:ln>
             <a:extLst>
               <a:ext uri="{91240B29-F687-4f45-9708-019B960494DF}">
-                <a14:hiddenLine xmlns:a14="http://schemas.microsoft.com/office/drawing/2010/main" xmlns="" w="9525">
+                <a14:hiddenLine xmlns="" xmlns:a14="http://schemas.microsoft.com/office/drawing/2010/main" w="9525">
                   <a:solidFill>
                     <a:srgbClr val="000000"/>
                   </a:solidFill>
@@ -2512,7 +2512,7 @@
             </a:ln>
             <a:extLst>
               <a:ext uri="{91240B29-F687-4f45-9708-019B960494DF}">
-                <a14:hiddenLine xmlns:a14="http://schemas.microsoft.com/office/drawing/2010/main" xmlns="" w="9525">
+                <a14:hiddenLine xmlns="" xmlns:a14="http://schemas.microsoft.com/office/drawing/2010/main" w="9525">
                   <a:solidFill>
                     <a:srgbClr val="000000"/>
                   </a:solidFill>
@@ -2574,7 +2574,7 @@
             </a:ln>
             <a:extLst>
               <a:ext uri="{91240B29-F687-4f45-9708-019B960494DF}">
-                <a14:hiddenLine xmlns:a14="http://schemas.microsoft.com/office/drawing/2010/main" xmlns="" w="9525">
+                <a14:hiddenLine xmlns="" xmlns:a14="http://schemas.microsoft.com/office/drawing/2010/main" w="9525">
                   <a:solidFill>
                     <a:srgbClr val="000000"/>
                   </a:solidFill>
@@ -2664,7 +2664,7 @@
             </a:ln>
             <a:extLst>
               <a:ext uri="{91240B29-F687-4f45-9708-019B960494DF}">
-                <a14:hiddenLine xmlns:a14="http://schemas.microsoft.com/office/drawing/2010/main" xmlns="" w="9525">
+                <a14:hiddenLine xmlns="" xmlns:a14="http://schemas.microsoft.com/office/drawing/2010/main" w="9525">
                   <a:solidFill>
                     <a:srgbClr val="000000"/>
                   </a:solidFill>
@@ -2732,7 +2732,7 @@
             </a:ln>
             <a:extLst>
               <a:ext uri="{91240B29-F687-4f45-9708-019B960494DF}">
-                <a14:hiddenLine xmlns:a14="http://schemas.microsoft.com/office/drawing/2010/main" xmlns="" w="9525">
+                <a14:hiddenLine xmlns="" xmlns:a14="http://schemas.microsoft.com/office/drawing/2010/main" w="9525">
                   <a:solidFill>
                     <a:srgbClr val="000000"/>
                   </a:solidFill>
@@ -2794,7 +2794,7 @@
             </a:ln>
             <a:extLst>
               <a:ext uri="{91240B29-F687-4f45-9708-019B960494DF}">
-                <a14:hiddenLine xmlns:a14="http://schemas.microsoft.com/office/drawing/2010/main" xmlns="" w="9525">
+                <a14:hiddenLine xmlns="" xmlns:a14="http://schemas.microsoft.com/office/drawing/2010/main" w="9525">
                   <a:solidFill>
                     <a:srgbClr val="000000"/>
                   </a:solidFill>
@@ -2884,7 +2884,7 @@
             </a:ln>
             <a:extLst>
               <a:ext uri="{91240B29-F687-4f45-9708-019B960494DF}">
-                <a14:hiddenLine xmlns:a14="http://schemas.microsoft.com/office/drawing/2010/main" xmlns="" w="9525">
+                <a14:hiddenLine xmlns="" xmlns:a14="http://schemas.microsoft.com/office/drawing/2010/main" w="9525">
                   <a:solidFill>
                     <a:srgbClr val="000000"/>
                   </a:solidFill>
@@ -2946,7 +2946,7 @@
             </a:ln>
             <a:extLst>
               <a:ext uri="{91240B29-F687-4f45-9708-019B960494DF}">
-                <a14:hiddenLine xmlns:a14="http://schemas.microsoft.com/office/drawing/2010/main" xmlns="" w="9525">
+                <a14:hiddenLine xmlns="" xmlns:a14="http://schemas.microsoft.com/office/drawing/2010/main" w="9525">
                   <a:solidFill>
                     <a:srgbClr val="000000"/>
                   </a:solidFill>
@@ -3036,7 +3036,7 @@
             </a:ln>
             <a:extLst>
               <a:ext uri="{91240B29-F687-4f45-9708-019B960494DF}">
-                <a14:hiddenLine xmlns:a14="http://schemas.microsoft.com/office/drawing/2010/main" xmlns="" w="9525">
+                <a14:hiddenLine xmlns="" xmlns:a14="http://schemas.microsoft.com/office/drawing/2010/main" w="9525">
                   <a:solidFill>
                     <a:srgbClr val="000000"/>
                   </a:solidFill>
@@ -3098,7 +3098,7 @@
             </a:ln>
             <a:extLst>
               <a:ext uri="{91240B29-F687-4f45-9708-019B960494DF}">
-                <a14:hiddenLine xmlns:a14="http://schemas.microsoft.com/office/drawing/2010/main" xmlns="" w="9525">
+                <a14:hiddenLine xmlns="" xmlns:a14="http://schemas.microsoft.com/office/drawing/2010/main" w="9525">
                   <a:solidFill>
                     <a:srgbClr val="000000"/>
                   </a:solidFill>
@@ -3188,7 +3188,7 @@
             </a:ln>
             <a:extLst>
               <a:ext uri="{91240B29-F687-4f45-9708-019B960494DF}">
-                <a14:hiddenLine xmlns:a14="http://schemas.microsoft.com/office/drawing/2010/main" xmlns="" w="9525">
+                <a14:hiddenLine xmlns="" xmlns:a14="http://schemas.microsoft.com/office/drawing/2010/main" w="9525">
                   <a:solidFill>
                     <a:srgbClr val="000000"/>
                   </a:solidFill>
@@ -3222,7 +3222,7 @@
             </a:ln>
             <a:extLst>
               <a:ext uri="{91240B29-F687-4f45-9708-019B960494DF}">
-                <a14:hiddenLine xmlns:a14="http://schemas.microsoft.com/office/drawing/2010/main" xmlns="" w="9525">
+                <a14:hiddenLine xmlns="" xmlns:a14="http://schemas.microsoft.com/office/drawing/2010/main" w="9525">
                   <a:solidFill>
                     <a:srgbClr val="000000"/>
                   </a:solidFill>
@@ -3287,7 +3287,7 @@
             </a:ln>
             <a:extLst>
               <a:ext uri="{91240B29-F687-4f45-9708-019B960494DF}">
-                <a14:hiddenLine xmlns:a14="http://schemas.microsoft.com/office/drawing/2010/main" xmlns="" w="9525">
+                <a14:hiddenLine xmlns="" xmlns:a14="http://schemas.microsoft.com/office/drawing/2010/main" w="9525">
                   <a:solidFill>
                     <a:srgbClr val="000000"/>
                   </a:solidFill>
@@ -3377,7 +3377,7 @@
             </a:ln>
             <a:extLst>
               <a:ext uri="{91240B29-F687-4f45-9708-019B960494DF}">
-                <a14:hiddenLine xmlns:a14="http://schemas.microsoft.com/office/drawing/2010/main" xmlns="" w="9525">
+                <a14:hiddenLine xmlns="" xmlns:a14="http://schemas.microsoft.com/office/drawing/2010/main" w="9525">
                   <a:solidFill>
                     <a:srgbClr val="000000"/>
                   </a:solidFill>
@@ -3439,7 +3439,7 @@
             </a:ln>
             <a:extLst>
               <a:ext uri="{91240B29-F687-4f45-9708-019B960494DF}">
-                <a14:hiddenLine xmlns:a14="http://schemas.microsoft.com/office/drawing/2010/main" xmlns="" w="9525">
+                <a14:hiddenLine xmlns="" xmlns:a14="http://schemas.microsoft.com/office/drawing/2010/main" w="9525">
                   <a:solidFill>
                     <a:srgbClr val="000000"/>
                   </a:solidFill>
@@ -3529,7 +3529,7 @@
             </a:ln>
             <a:extLst>
               <a:ext uri="{91240B29-F687-4f45-9708-019B960494DF}">
-                <a14:hiddenLine xmlns:a14="http://schemas.microsoft.com/office/drawing/2010/main" xmlns="" w="9525">
+                <a14:hiddenLine xmlns="" xmlns:a14="http://schemas.microsoft.com/office/drawing/2010/main" w="9525">
                   <a:solidFill>
                     <a:srgbClr val="000000"/>
                   </a:solidFill>
@@ -3619,7 +3619,7 @@
             </a:ln>
             <a:extLst>
               <a:ext uri="{91240B29-F687-4f45-9708-019B960494DF}">
-                <a14:hiddenLine xmlns:a14="http://schemas.microsoft.com/office/drawing/2010/main" xmlns="" w="9525">
+                <a14:hiddenLine xmlns="" xmlns:a14="http://schemas.microsoft.com/office/drawing/2010/main" w="9525">
                   <a:solidFill>
                     <a:srgbClr val="000000"/>
                   </a:solidFill>
@@ -3684,7 +3684,7 @@
             </a:ln>
             <a:extLst>
               <a:ext uri="{91240B29-F687-4f45-9708-019B960494DF}">
-                <a14:hiddenLine xmlns:a14="http://schemas.microsoft.com/office/drawing/2010/main" xmlns="" w="9525">
+                <a14:hiddenLine xmlns="" xmlns:a14="http://schemas.microsoft.com/office/drawing/2010/main" w="9525">
                   <a:solidFill>
                     <a:srgbClr val="000000"/>
                   </a:solidFill>
@@ -3746,7 +3746,7 @@
             </a:ln>
             <a:extLst>
               <a:ext uri="{91240B29-F687-4f45-9708-019B960494DF}">
-                <a14:hiddenLine xmlns:a14="http://schemas.microsoft.com/office/drawing/2010/main" xmlns="" w="9525">
+                <a14:hiddenLine xmlns="" xmlns:a14="http://schemas.microsoft.com/office/drawing/2010/main" w="9525">
                   <a:solidFill>
                     <a:srgbClr val="000000"/>
                   </a:solidFill>
@@ -3836,7 +3836,7 @@
             </a:ln>
             <a:extLst>
               <a:ext uri="{91240B29-F687-4f45-9708-019B960494DF}">
-                <a14:hiddenLine xmlns:a14="http://schemas.microsoft.com/office/drawing/2010/main" xmlns="" w="9525">
+                <a14:hiddenLine xmlns="" xmlns:a14="http://schemas.microsoft.com/office/drawing/2010/main" w="9525">
                   <a:solidFill>
                     <a:srgbClr val="000000"/>
                   </a:solidFill>
@@ -3926,7 +3926,7 @@
             </a:ln>
             <a:extLst>
               <a:ext uri="{91240B29-F687-4f45-9708-019B960494DF}">
-                <a14:hiddenLine xmlns:a14="http://schemas.microsoft.com/office/drawing/2010/main" xmlns="" w="9525">
+                <a14:hiddenLine xmlns="" xmlns:a14="http://schemas.microsoft.com/office/drawing/2010/main" w="9525">
                   <a:solidFill>
                     <a:srgbClr val="000000"/>
                   </a:solidFill>
@@ -3988,7 +3988,7 @@
             </a:ln>
             <a:extLst>
               <a:ext uri="{91240B29-F687-4f45-9708-019B960494DF}">
-                <a14:hiddenLine xmlns:a14="http://schemas.microsoft.com/office/drawing/2010/main" xmlns="" w="9525">
+                <a14:hiddenLine xmlns="" xmlns:a14="http://schemas.microsoft.com/office/drawing/2010/main" w="9525">
                   <a:solidFill>
                     <a:srgbClr val="000000"/>
                   </a:solidFill>
@@ -4108,7 +4108,7 @@
             </a:ln>
             <a:extLst>
               <a:ext uri="{91240B29-F687-4f45-9708-019B960494DF}">
-                <a14:hiddenLine xmlns:a14="http://schemas.microsoft.com/office/drawing/2010/main" xmlns="" w="9525">
+                <a14:hiddenLine xmlns="" xmlns:a14="http://schemas.microsoft.com/office/drawing/2010/main" w="9525">
                   <a:solidFill>
                     <a:srgbClr val="000000"/>
                   </a:solidFill>
@@ -4176,7 +4176,7 @@
             </a:ln>
             <a:extLst>
               <a:ext uri="{91240B29-F687-4f45-9708-019B960494DF}">
-                <a14:hiddenLine xmlns:a14="http://schemas.microsoft.com/office/drawing/2010/main" xmlns="" w="9525">
+                <a14:hiddenLine xmlns="" xmlns:a14="http://schemas.microsoft.com/office/drawing/2010/main" w="9525">
                   <a:solidFill>
                     <a:srgbClr val="000000"/>
                   </a:solidFill>
@@ -4266,7 +4266,7 @@
             </a:ln>
             <a:extLst>
               <a:ext uri="{91240B29-F687-4f45-9708-019B960494DF}">
-                <a14:hiddenLine xmlns:a14="http://schemas.microsoft.com/office/drawing/2010/main" xmlns="" w="9525">
+                <a14:hiddenLine xmlns="" xmlns:a14="http://schemas.microsoft.com/office/drawing/2010/main" w="9525">
                   <a:solidFill>
                     <a:srgbClr val="000000"/>
                   </a:solidFill>
@@ -9073,7 +9073,7 @@
           <a:noFill/>
           <a:extLst>
             <a:ext uri="{909E8E84-426E-40dd-AFC4-6F175D3DCCD1}">
-              <a14:hiddenFill xmlns:a14="http://schemas.microsoft.com/office/drawing/2010/main" xmlns="">
+              <a14:hiddenFill xmlns="" xmlns:a14="http://schemas.microsoft.com/office/drawing/2010/main">
                 <a:solidFill>
                   <a:srgbClr val="FFFFFF"/>
                 </a:solidFill>
@@ -9147,7 +9147,7 @@
               </a:ln>
               <a:extLst>
                 <a:ext uri="{91240B29-F687-4f45-9708-019B960494DF}">
-                  <a14:hiddenLine xmlns:a14="http://schemas.microsoft.com/office/drawing/2010/main" xmlns="" w="9525">
+                  <a14:hiddenLine xmlns="" xmlns:a14="http://schemas.microsoft.com/office/drawing/2010/main" w="9525">
                     <a:solidFill>
                       <a:srgbClr val="000000"/>
                     </a:solidFill>
@@ -9237,7 +9237,7 @@
               </a:ln>
               <a:extLst>
                 <a:ext uri="{91240B29-F687-4f45-9708-019B960494DF}">
-                  <a14:hiddenLine xmlns:a14="http://schemas.microsoft.com/office/drawing/2010/main" xmlns="" w="9525">
+                  <a14:hiddenLine xmlns="" xmlns:a14="http://schemas.microsoft.com/office/drawing/2010/main" w="9525">
                     <a:solidFill>
                       <a:srgbClr val="000000"/>
                     </a:solidFill>
@@ -9327,7 +9327,7 @@
               </a:ln>
               <a:extLst>
                 <a:ext uri="{91240B29-F687-4f45-9708-019B960494DF}">
-                  <a14:hiddenLine xmlns:a14="http://schemas.microsoft.com/office/drawing/2010/main" xmlns="" w="9525">
+                  <a14:hiddenLine xmlns="" xmlns:a14="http://schemas.microsoft.com/office/drawing/2010/main" w="9525">
                     <a:solidFill>
                       <a:srgbClr val="000000"/>
                     </a:solidFill>
@@ -9389,7 +9389,7 @@
               </a:ln>
               <a:extLst>
                 <a:ext uri="{91240B29-F687-4f45-9708-019B960494DF}">
-                  <a14:hiddenLine xmlns:a14="http://schemas.microsoft.com/office/drawing/2010/main" xmlns="" w="9525">
+                  <a14:hiddenLine xmlns="" xmlns:a14="http://schemas.microsoft.com/office/drawing/2010/main" w="9525">
                     <a:solidFill>
                       <a:srgbClr val="000000"/>
                     </a:solidFill>
@@ -9479,7 +9479,7 @@
               </a:ln>
               <a:extLst>
                 <a:ext uri="{91240B29-F687-4f45-9708-019B960494DF}">
-                  <a14:hiddenLine xmlns:a14="http://schemas.microsoft.com/office/drawing/2010/main" xmlns="" w="9525">
+                  <a14:hiddenLine xmlns="" xmlns:a14="http://schemas.microsoft.com/office/drawing/2010/main" w="9525">
                     <a:solidFill>
                       <a:srgbClr val="000000"/>
                     </a:solidFill>
@@ -9541,7 +9541,7 @@
               </a:ln>
               <a:extLst>
                 <a:ext uri="{91240B29-F687-4f45-9708-019B960494DF}">
-                  <a14:hiddenLine xmlns:a14="http://schemas.microsoft.com/office/drawing/2010/main" xmlns="" w="9525">
+                  <a14:hiddenLine xmlns="" xmlns:a14="http://schemas.microsoft.com/office/drawing/2010/main" w="9525">
                     <a:solidFill>
                       <a:srgbClr val="000000"/>
                     </a:solidFill>
@@ -9603,7 +9603,7 @@
               </a:ln>
               <a:extLst>
                 <a:ext uri="{91240B29-F687-4f45-9708-019B960494DF}">
-                  <a14:hiddenLine xmlns:a14="http://schemas.microsoft.com/office/drawing/2010/main" xmlns="" w="9525">
+                  <a14:hiddenLine xmlns="" xmlns:a14="http://schemas.microsoft.com/office/drawing/2010/main" w="9525">
                     <a:solidFill>
                       <a:srgbClr val="000000"/>
                     </a:solidFill>
@@ -9693,7 +9693,7 @@
               </a:ln>
               <a:extLst>
                 <a:ext uri="{91240B29-F687-4f45-9708-019B960494DF}">
-                  <a14:hiddenLine xmlns:a14="http://schemas.microsoft.com/office/drawing/2010/main" xmlns="" w="9525">
+                  <a14:hiddenLine xmlns="" xmlns:a14="http://schemas.microsoft.com/office/drawing/2010/main" w="9525">
                     <a:solidFill>
                       <a:srgbClr val="000000"/>
                     </a:solidFill>
@@ -9783,7 +9783,7 @@
               </a:ln>
               <a:extLst>
                 <a:ext uri="{91240B29-F687-4f45-9708-019B960494DF}">
-                  <a14:hiddenLine xmlns:a14="http://schemas.microsoft.com/office/drawing/2010/main" xmlns="" w="9525">
+                  <a14:hiddenLine xmlns="" xmlns:a14="http://schemas.microsoft.com/office/drawing/2010/main" w="9525">
                     <a:solidFill>
                       <a:srgbClr val="000000"/>
                     </a:solidFill>
@@ -9845,7 +9845,7 @@
               </a:ln>
               <a:extLst>
                 <a:ext uri="{91240B29-F687-4f45-9708-019B960494DF}">
-                  <a14:hiddenLine xmlns:a14="http://schemas.microsoft.com/office/drawing/2010/main" xmlns="" w="9525">
+                  <a14:hiddenLine xmlns="" xmlns:a14="http://schemas.microsoft.com/office/drawing/2010/main" w="9525">
                     <a:solidFill>
                       <a:srgbClr val="000000"/>
                     </a:solidFill>
@@ -9955,7 +9955,7 @@
               </a:ln>
               <a:extLst>
                 <a:ext uri="{91240B29-F687-4f45-9708-019B960494DF}">
-                  <a14:hiddenLine xmlns:a14="http://schemas.microsoft.com/office/drawing/2010/main" xmlns="" w="9525">
+                  <a14:hiddenLine xmlns="" xmlns:a14="http://schemas.microsoft.com/office/drawing/2010/main" w="9525">
                     <a:solidFill>
                       <a:srgbClr val="000000"/>
                     </a:solidFill>
@@ -10039,7 +10039,7 @@
               </a:ln>
               <a:extLst>
                 <a:ext uri="{91240B29-F687-4f45-9708-019B960494DF}">
-                  <a14:hiddenLine xmlns:a14="http://schemas.microsoft.com/office/drawing/2010/main" xmlns="" w="9525">
+                  <a14:hiddenLine xmlns="" xmlns:a14="http://schemas.microsoft.com/office/drawing/2010/main" w="9525">
                     <a:solidFill>
                       <a:srgbClr val="000000"/>
                     </a:solidFill>
@@ -10101,7 +10101,7 @@
               </a:ln>
               <a:extLst>
                 <a:ext uri="{91240B29-F687-4f45-9708-019B960494DF}">
-                  <a14:hiddenLine xmlns:a14="http://schemas.microsoft.com/office/drawing/2010/main" xmlns="" w="9525">
+                  <a14:hiddenLine xmlns="" xmlns:a14="http://schemas.microsoft.com/office/drawing/2010/main" w="9525">
                     <a:solidFill>
                       <a:srgbClr val="000000"/>
                     </a:solidFill>
@@ -10163,7 +10163,7 @@
               </a:ln>
               <a:extLst>
                 <a:ext uri="{91240B29-F687-4f45-9708-019B960494DF}">
-                  <a14:hiddenLine xmlns:a14="http://schemas.microsoft.com/office/drawing/2010/main" xmlns="" w="9525">
+                  <a14:hiddenLine xmlns="" xmlns:a14="http://schemas.microsoft.com/office/drawing/2010/main" w="9525">
                     <a:solidFill>
                       <a:srgbClr val="000000"/>
                     </a:solidFill>
@@ -10253,7 +10253,7 @@
               </a:ln>
               <a:extLst>
                 <a:ext uri="{91240B29-F687-4f45-9708-019B960494DF}">
-                  <a14:hiddenLine xmlns:a14="http://schemas.microsoft.com/office/drawing/2010/main" xmlns="" w="9525">
+                  <a14:hiddenLine xmlns="" xmlns:a14="http://schemas.microsoft.com/office/drawing/2010/main" w="9525">
                     <a:solidFill>
                       <a:srgbClr val="000000"/>
                     </a:solidFill>
@@ -10287,7 +10287,7 @@
               </a:ln>
               <a:extLst>
                 <a:ext uri="{91240B29-F687-4f45-9708-019B960494DF}">
-                  <a14:hiddenLine xmlns:a14="http://schemas.microsoft.com/office/drawing/2010/main" xmlns="" w="9525">
+                  <a14:hiddenLine xmlns="" xmlns:a14="http://schemas.microsoft.com/office/drawing/2010/main" w="9525">
                     <a:solidFill>
                       <a:srgbClr val="000000"/>
                     </a:solidFill>
@@ -10352,7 +10352,7 @@
               </a:ln>
               <a:extLst>
                 <a:ext uri="{91240B29-F687-4f45-9708-019B960494DF}">
-                  <a14:hiddenLine xmlns:a14="http://schemas.microsoft.com/office/drawing/2010/main" xmlns="" w="9525">
+                  <a14:hiddenLine xmlns="" xmlns:a14="http://schemas.microsoft.com/office/drawing/2010/main" w="9525">
                     <a:solidFill>
                       <a:srgbClr val="000000"/>
                     </a:solidFill>
@@ -10442,7 +10442,7 @@
               </a:ln>
               <a:extLst>
                 <a:ext uri="{91240B29-F687-4f45-9708-019B960494DF}">
-                  <a14:hiddenLine xmlns:a14="http://schemas.microsoft.com/office/drawing/2010/main" xmlns="" w="9525">
+                  <a14:hiddenLine xmlns="" xmlns:a14="http://schemas.microsoft.com/office/drawing/2010/main" w="9525">
                     <a:solidFill>
                       <a:srgbClr val="000000"/>
                     </a:solidFill>
@@ -10504,7 +10504,7 @@
               </a:ln>
               <a:extLst>
                 <a:ext uri="{91240B29-F687-4f45-9708-019B960494DF}">
-                  <a14:hiddenLine xmlns:a14="http://schemas.microsoft.com/office/drawing/2010/main" xmlns="" w="9525">
+                  <a14:hiddenLine xmlns="" xmlns:a14="http://schemas.microsoft.com/office/drawing/2010/main" w="9525">
                     <a:solidFill>
                       <a:srgbClr val="000000"/>
                     </a:solidFill>
@@ -10594,7 +10594,7 @@
               </a:ln>
               <a:extLst>
                 <a:ext uri="{91240B29-F687-4f45-9708-019B960494DF}">
-                  <a14:hiddenLine xmlns:a14="http://schemas.microsoft.com/office/drawing/2010/main" xmlns="" w="9525">
+                  <a14:hiddenLine xmlns="" xmlns:a14="http://schemas.microsoft.com/office/drawing/2010/main" w="9525">
                     <a:solidFill>
                       <a:srgbClr val="000000"/>
                     </a:solidFill>
@@ -10659,7 +10659,7 @@
               </a:ln>
               <a:extLst>
                 <a:ext uri="{91240B29-F687-4f45-9708-019B960494DF}">
-                  <a14:hiddenLine xmlns:a14="http://schemas.microsoft.com/office/drawing/2010/main" xmlns="" w="9525">
+                  <a14:hiddenLine xmlns="" xmlns:a14="http://schemas.microsoft.com/office/drawing/2010/main" w="9525">
                     <a:solidFill>
                       <a:srgbClr val="000000"/>
                     </a:solidFill>
@@ -10721,7 +10721,7 @@
               </a:ln>
               <a:extLst>
                 <a:ext uri="{91240B29-F687-4f45-9708-019B960494DF}">
-                  <a14:hiddenLine xmlns:a14="http://schemas.microsoft.com/office/drawing/2010/main" xmlns="" w="9525">
+                  <a14:hiddenLine xmlns="" xmlns:a14="http://schemas.microsoft.com/office/drawing/2010/main" w="9525">
                     <a:solidFill>
                       <a:srgbClr val="000000"/>
                     </a:solidFill>
@@ -10811,7 +10811,7 @@
               </a:ln>
               <a:extLst>
                 <a:ext uri="{91240B29-F687-4f45-9708-019B960494DF}">
-                  <a14:hiddenLine xmlns:a14="http://schemas.microsoft.com/office/drawing/2010/main" xmlns="" w="9525">
+                  <a14:hiddenLine xmlns="" xmlns:a14="http://schemas.microsoft.com/office/drawing/2010/main" w="9525">
                     <a:solidFill>
                       <a:srgbClr val="000000"/>
                     </a:solidFill>
@@ -10901,7 +10901,7 @@
               </a:ln>
               <a:extLst>
                 <a:ext uri="{91240B29-F687-4f45-9708-019B960494DF}">
-                  <a14:hiddenLine xmlns:a14="http://schemas.microsoft.com/office/drawing/2010/main" xmlns="" w="9525">
+                  <a14:hiddenLine xmlns="" xmlns:a14="http://schemas.microsoft.com/office/drawing/2010/main" w="9525">
                     <a:solidFill>
                       <a:srgbClr val="000000"/>
                     </a:solidFill>
@@ -10966,7 +10966,7 @@
               </a:ln>
               <a:extLst>
                 <a:ext uri="{91240B29-F687-4f45-9708-019B960494DF}">
-                  <a14:hiddenLine xmlns:a14="http://schemas.microsoft.com/office/drawing/2010/main" xmlns="" w="9525">
+                  <a14:hiddenLine xmlns="" xmlns:a14="http://schemas.microsoft.com/office/drawing/2010/main" w="9525">
                     <a:solidFill>
                       <a:srgbClr val="000000"/>
                     </a:solidFill>
@@ -11086,7 +11086,7 @@
               </a:ln>
               <a:extLst>
                 <a:ext uri="{91240B29-F687-4f45-9708-019B960494DF}">
-                  <a14:hiddenLine xmlns:a14="http://schemas.microsoft.com/office/drawing/2010/main" xmlns="" w="9525">
+                  <a14:hiddenLine xmlns="" xmlns:a14="http://schemas.microsoft.com/office/drawing/2010/main" w="9525">
                     <a:solidFill>
                       <a:srgbClr val="000000"/>
                     </a:solidFill>
@@ -11184,7 +11184,7 @@
               </a:ln>
               <a:extLst>
                 <a:ext uri="{91240B29-F687-4f45-9708-019B960494DF}">
-                  <a14:hiddenLine xmlns:a14="http://schemas.microsoft.com/office/drawing/2010/main" xmlns="" w="9525">
+                  <a14:hiddenLine xmlns="" xmlns:a14="http://schemas.microsoft.com/office/drawing/2010/main" w="9525">
                     <a:solidFill>
                       <a:srgbClr val="000000"/>
                     </a:solidFill>
@@ -11299,7 +11299,7 @@
               </a:ln>
               <a:extLst>
                 <a:ext uri="{91240B29-F687-4f45-9708-019B960494DF}">
-                  <a14:hiddenLine xmlns:a14="http://schemas.microsoft.com/office/drawing/2010/main" xmlns="" w="9525">
+                  <a14:hiddenLine xmlns="" xmlns:a14="http://schemas.microsoft.com/office/drawing/2010/main" w="9525">
                     <a:solidFill>
                       <a:srgbClr val="000000"/>
                     </a:solidFill>
@@ -11389,7 +11389,7 @@
               </a:ln>
               <a:extLst>
                 <a:ext uri="{91240B29-F687-4f45-9708-019B960494DF}">
-                  <a14:hiddenLine xmlns:a14="http://schemas.microsoft.com/office/drawing/2010/main" xmlns="" w="9525">
+                  <a14:hiddenLine xmlns="" xmlns:a14="http://schemas.microsoft.com/office/drawing/2010/main" w="9525">
                     <a:solidFill>
                       <a:srgbClr val="000000"/>
                     </a:solidFill>
@@ -11454,7 +11454,7 @@
               </a:ln>
               <a:extLst>
                 <a:ext uri="{91240B29-F687-4f45-9708-019B960494DF}">
-                  <a14:hiddenLine xmlns:a14="http://schemas.microsoft.com/office/drawing/2010/main" xmlns="" w="9525">
+                  <a14:hiddenLine xmlns="" xmlns:a14="http://schemas.microsoft.com/office/drawing/2010/main" w="9525">
                     <a:solidFill>
                       <a:srgbClr val="000000"/>
                     </a:solidFill>
@@ -11544,7 +11544,7 @@
               </a:ln>
               <a:extLst>
                 <a:ext uri="{91240B29-F687-4f45-9708-019B960494DF}">
-                  <a14:hiddenLine xmlns:a14="http://schemas.microsoft.com/office/drawing/2010/main" xmlns="" w="9525">
+                  <a14:hiddenLine xmlns="" xmlns:a14="http://schemas.microsoft.com/office/drawing/2010/main" w="9525">
                     <a:solidFill>
                       <a:srgbClr val="000000"/>
                     </a:solidFill>
@@ -11612,7 +11612,7 @@
               </a:ln>
               <a:extLst>
                 <a:ext uri="{91240B29-F687-4f45-9708-019B960494DF}">
-                  <a14:hiddenLine xmlns:a14="http://schemas.microsoft.com/office/drawing/2010/main" xmlns="" w="9525">
+                  <a14:hiddenLine xmlns="" xmlns:a14="http://schemas.microsoft.com/office/drawing/2010/main" w="9525">
                     <a:solidFill>
                       <a:srgbClr val="000000"/>
                     </a:solidFill>
@@ -11702,7 +11702,7 @@
               </a:ln>
               <a:extLst>
                 <a:ext uri="{91240B29-F687-4f45-9708-019B960494DF}">
-                  <a14:hiddenLine xmlns:a14="http://schemas.microsoft.com/office/drawing/2010/main" xmlns="" w="9525">
+                  <a14:hiddenLine xmlns="" xmlns:a14="http://schemas.microsoft.com/office/drawing/2010/main" w="9525">
                     <a:solidFill>
                       <a:srgbClr val="000000"/>
                     </a:solidFill>
@@ -11770,7 +11770,7 @@
               </a:ln>
               <a:extLst>
                 <a:ext uri="{91240B29-F687-4f45-9708-019B960494DF}">
-                  <a14:hiddenLine xmlns:a14="http://schemas.microsoft.com/office/drawing/2010/main" xmlns="" w="9525">
+                  <a14:hiddenLine xmlns="" xmlns:a14="http://schemas.microsoft.com/office/drawing/2010/main" w="9525">
                     <a:solidFill>
                       <a:srgbClr val="000000"/>
                     </a:solidFill>
@@ -11860,7 +11860,7 @@
               </a:ln>
               <a:extLst>
                 <a:ext uri="{91240B29-F687-4f45-9708-019B960494DF}">
-                  <a14:hiddenLine xmlns:a14="http://schemas.microsoft.com/office/drawing/2010/main" xmlns="" w="9525">
+                  <a14:hiddenLine xmlns="" xmlns:a14="http://schemas.microsoft.com/office/drawing/2010/main" w="9525">
                     <a:solidFill>
                       <a:srgbClr val="000000"/>
                     </a:solidFill>
@@ -11894,7 +11894,7 @@
               </a:ln>
               <a:extLst>
                 <a:ext uri="{91240B29-F687-4f45-9708-019B960494DF}">
-                  <a14:hiddenLine xmlns:a14="http://schemas.microsoft.com/office/drawing/2010/main" xmlns="" w="9525">
+                  <a14:hiddenLine xmlns="" xmlns:a14="http://schemas.microsoft.com/office/drawing/2010/main" w="9525">
                     <a:solidFill>
                       <a:srgbClr val="000000"/>
                     </a:solidFill>
@@ -12786,10 +12786,10 @@
       </p:sp>
       <p:pic>
         <p:nvPicPr>
-          <p:cNvPr id="6" name="Picture 5">
+          <p:cNvPr id="5" name="Picture 4">
             <a:extLst>
               <a:ext uri="{FF2B5EF4-FFF2-40B4-BE49-F238E27FC236}">
-                <a16:creationId xmlns:a16="http://schemas.microsoft.com/office/drawing/2014/main" id="{A60629D2-1919-41F5-B7EF-13AF213A20CF}"/>
+                <a16:creationId xmlns:a16="http://schemas.microsoft.com/office/drawing/2014/main" id="{0DEBE9CA-75DF-49C0-8DF2-93BA7E371AD6}"/>
               </a:ext>
             </a:extLst>
           </p:cNvPr>
@@ -12812,8 +12812,8 @@
         </p:blipFill>
         <p:spPr>
           <a:xfrm>
-            <a:off x="455386" y="1213410"/>
-            <a:ext cx="11507806" cy="1011900"/>
+            <a:off x="418920" y="1154691"/>
+            <a:ext cx="11679280" cy="809738"/>
           </a:xfrm>
           <a:prstGeom prst="rect">
             <a:avLst/>
@@ -13265,10 +13265,10 @@
       </p:sp>
       <p:pic>
         <p:nvPicPr>
-          <p:cNvPr id="10" name="Content Placeholder 9">
+          <p:cNvPr id="6" name="Content Placeholder 5">
             <a:extLst>
               <a:ext uri="{FF2B5EF4-FFF2-40B4-BE49-F238E27FC236}">
-                <a16:creationId xmlns:a16="http://schemas.microsoft.com/office/drawing/2014/main" id="{2BC49BFF-BDD0-4399-9F11-B5797E7FADDA}"/>
+                <a16:creationId xmlns:a16="http://schemas.microsoft.com/office/drawing/2014/main" id="{78B66F0C-4C39-40AF-843C-419E10091156}"/>
               </a:ext>
             </a:extLst>
           </p:cNvPr>
@@ -13293,8 +13293,8 @@
         </p:blipFill>
         <p:spPr>
           <a:xfrm>
-            <a:off x="946768" y="1229989"/>
-            <a:ext cx="9905998" cy="5089891"/>
+            <a:off x="995681" y="1219200"/>
+            <a:ext cx="10051730" cy="5080000"/>
           </a:xfrm>
         </p:spPr>
       </p:pic>
